--- a/network/ppt/Transport Layer.pptx
+++ b/network/ppt/Transport Layer.pptx
@@ -278,7 +278,7 @@
           <a:p>
             <a:fld id="{335C27EC-B482-43A8-9F29-5226AFF067B3}" type="datetimeFigureOut">
               <a:rPr lang="zh-CN" altLang="en-US" smtClean="0"/>
-              <a:t>2025/10/19</a:t>
+              <a:t>2025/11/7</a:t>
             </a:fld>
             <a:endParaRPr lang="zh-CN" altLang="en-US"/>
           </a:p>
@@ -566,7 +566,7 @@
           <a:p>
             <a:fld id="{335C27EC-B482-43A8-9F29-5226AFF067B3}" type="datetimeFigureOut">
               <a:rPr lang="zh-CN" altLang="en-US" smtClean="0"/>
-              <a:t>2025/10/19</a:t>
+              <a:t>2025/11/7</a:t>
             </a:fld>
             <a:endParaRPr lang="zh-CN" altLang="en-US"/>
           </a:p>
@@ -764,7 +764,7 @@
           <a:p>
             <a:fld id="{335C27EC-B482-43A8-9F29-5226AFF067B3}" type="datetimeFigureOut">
               <a:rPr lang="zh-CN" altLang="en-US" smtClean="0"/>
-              <a:t>2025/10/19</a:t>
+              <a:t>2025/11/7</a:t>
             </a:fld>
             <a:endParaRPr lang="zh-CN" altLang="en-US"/>
           </a:p>
@@ -972,7 +972,7 @@
           <a:p>
             <a:fld id="{335C27EC-B482-43A8-9F29-5226AFF067B3}" type="datetimeFigureOut">
               <a:rPr lang="zh-CN" altLang="en-US" smtClean="0"/>
-              <a:t>2025/10/19</a:t>
+              <a:t>2025/11/7</a:t>
             </a:fld>
             <a:endParaRPr lang="zh-CN" altLang="en-US"/>
           </a:p>
@@ -1170,7 +1170,7 @@
           <a:p>
             <a:fld id="{335C27EC-B482-43A8-9F29-5226AFF067B3}" type="datetimeFigureOut">
               <a:rPr lang="zh-CN" altLang="en-US" smtClean="0"/>
-              <a:t>2025/10/19</a:t>
+              <a:t>2025/11/7</a:t>
             </a:fld>
             <a:endParaRPr lang="zh-CN" altLang="en-US"/>
           </a:p>
@@ -1445,7 +1445,7 @@
           <a:p>
             <a:fld id="{335C27EC-B482-43A8-9F29-5226AFF067B3}" type="datetimeFigureOut">
               <a:rPr lang="zh-CN" altLang="en-US" smtClean="0"/>
-              <a:t>2025/10/19</a:t>
+              <a:t>2025/11/7</a:t>
             </a:fld>
             <a:endParaRPr lang="zh-CN" altLang="en-US"/>
           </a:p>
@@ -1710,7 +1710,7 @@
           <a:p>
             <a:fld id="{335C27EC-B482-43A8-9F29-5226AFF067B3}" type="datetimeFigureOut">
               <a:rPr lang="zh-CN" altLang="en-US" smtClean="0"/>
-              <a:t>2025/10/19</a:t>
+              <a:t>2025/11/7</a:t>
             </a:fld>
             <a:endParaRPr lang="zh-CN" altLang="en-US"/>
           </a:p>
@@ -2122,7 +2122,7 @@
           <a:p>
             <a:fld id="{335C27EC-B482-43A8-9F29-5226AFF067B3}" type="datetimeFigureOut">
               <a:rPr lang="zh-CN" altLang="en-US" smtClean="0"/>
-              <a:t>2025/10/19</a:t>
+              <a:t>2025/11/7</a:t>
             </a:fld>
             <a:endParaRPr lang="zh-CN" altLang="en-US"/>
           </a:p>
@@ -2263,7 +2263,7 @@
           <a:p>
             <a:fld id="{335C27EC-B482-43A8-9F29-5226AFF067B3}" type="datetimeFigureOut">
               <a:rPr lang="zh-CN" altLang="en-US" smtClean="0"/>
-              <a:t>2025/10/19</a:t>
+              <a:t>2025/11/7</a:t>
             </a:fld>
             <a:endParaRPr lang="zh-CN" altLang="en-US"/>
           </a:p>
@@ -2896,7 +2896,7 @@
           <a:p>
             <a:fld id="{335C27EC-B482-43A8-9F29-5226AFF067B3}" type="datetimeFigureOut">
               <a:rPr lang="zh-CN" altLang="en-US" smtClean="0"/>
-              <a:t>2025/10/19</a:t>
+              <a:t>2025/11/7</a:t>
             </a:fld>
             <a:endParaRPr lang="zh-CN" altLang="en-US"/>
           </a:p>
@@ -3116,7 +3116,7 @@
           <a:p>
             <a:fld id="{335C27EC-B482-43A8-9F29-5226AFF067B3}" type="datetimeFigureOut">
               <a:rPr lang="zh-CN" altLang="en-US" smtClean="0"/>
-              <a:t>2025/10/19</a:t>
+              <a:t>2025/11/7</a:t>
             </a:fld>
             <a:endParaRPr lang="zh-CN" altLang="en-US"/>
           </a:p>
@@ -16517,7 +16517,7 @@
           <p:nvPr>
             <p:extLst>
               <p:ext uri="{D42A27DB-BD31-4B8C-83A1-F6EECF244321}">
-                <p14:modId xmlns:p14="http://schemas.microsoft.com/office/powerpoint/2010/main" val="946531750"/>
+                <p14:modId xmlns:p14="http://schemas.microsoft.com/office/powerpoint/2010/main" val="4287337492"/>
               </p:ext>
             </p:extLst>
           </p:nvPr>
@@ -16547,12 +16547,13 @@
                     <a:bodyPr/>
                     <a:lstStyle/>
                     <a:p>
+                      <a:pPr algn="ctr"/>
                       <a:r>
                         <a:rPr lang="en-US" altLang="zh-CN" sz="1400" b="0" dirty="0">
                           <a:solidFill>
                             <a:schemeClr val="tx1"/>
                           </a:solidFill>
-                          <a:latin typeface="Courier New" panose="02070309020205020404" pitchFamily="49" charset="0"/>
+                          <a:latin typeface="Montserrat" panose="00000500000000000000" pitchFamily="2" charset="0"/>
                           <a:cs typeface="Courier New" panose="02070309020205020404" pitchFamily="49" charset="0"/>
                         </a:rPr>
                         <a:t>Application layer</a:t>
@@ -16561,7 +16562,7 @@
                         <a:solidFill>
                           <a:schemeClr val="tx1"/>
                         </a:solidFill>
-                        <a:latin typeface="Courier New" panose="02070309020205020404" pitchFamily="49" charset="0"/>
+                        <a:latin typeface="Montserrat" panose="00000500000000000000" pitchFamily="2" charset="0"/>
                         <a:cs typeface="Courier New" panose="02070309020205020404" pitchFamily="49" charset="0"/>
                       </a:endParaRPr>
                     </a:p>
@@ -16569,7 +16570,10 @@
                   <a:tcPr>
                     <a:lnL w="12700" cap="flat" cmpd="sng" algn="ctr">
                       <a:solidFill>
-                        <a:schemeClr val="tx1"/>
+                        <a:schemeClr val="tx1">
+                          <a:lumMod val="50000"/>
+                          <a:lumOff val="50000"/>
+                        </a:schemeClr>
                       </a:solidFill>
                       <a:prstDash val="solid"/>
                       <a:round/>
@@ -16578,7 +16582,10 @@
                     </a:lnL>
                     <a:lnR w="12700" cap="flat" cmpd="sng" algn="ctr">
                       <a:solidFill>
-                        <a:schemeClr val="tx1"/>
+                        <a:schemeClr val="tx1">
+                          <a:lumMod val="50000"/>
+                          <a:lumOff val="50000"/>
+                        </a:schemeClr>
                       </a:solidFill>
                       <a:prstDash val="solid"/>
                       <a:round/>
@@ -16587,7 +16594,10 @@
                     </a:lnR>
                     <a:lnT w="12700" cap="flat" cmpd="sng" algn="ctr">
                       <a:solidFill>
-                        <a:schemeClr val="tx1"/>
+                        <a:schemeClr val="tx1">
+                          <a:lumMod val="50000"/>
+                          <a:lumOff val="50000"/>
+                        </a:schemeClr>
                       </a:solidFill>
                       <a:prstDash val="solid"/>
                       <a:round/>
@@ -16596,7 +16606,10 @@
                     </a:lnT>
                     <a:lnB w="12700" cap="flat" cmpd="sng" algn="ctr">
                       <a:solidFill>
-                        <a:schemeClr val="tx1"/>
+                        <a:schemeClr val="tx1">
+                          <a:lumMod val="50000"/>
+                          <a:lumOff val="50000"/>
+                        </a:schemeClr>
                       </a:solidFill>
                       <a:prstDash val="solid"/>
                       <a:round/>
@@ -16623,7 +16636,7 @@
                           <a:solidFill>
                             <a:schemeClr val="bg1"/>
                           </a:solidFill>
-                          <a:latin typeface="Courier New" panose="02070309020205020404" pitchFamily="49" charset="0"/>
+                          <a:latin typeface="Montserrat" panose="00000500000000000000" pitchFamily="2" charset="0"/>
                           <a:cs typeface="Courier New" panose="02070309020205020404" pitchFamily="49" charset="0"/>
                         </a:rPr>
                         <a:t>Transport layer</a:t>
@@ -16632,7 +16645,7 @@
                         <a:solidFill>
                           <a:schemeClr val="bg1"/>
                         </a:solidFill>
-                        <a:latin typeface="Courier New" panose="02070309020205020404" pitchFamily="49" charset="0"/>
+                        <a:latin typeface="Montserrat" panose="00000500000000000000" pitchFamily="2" charset="0"/>
                         <a:cs typeface="Courier New" panose="02070309020205020404" pitchFamily="49" charset="0"/>
                       </a:endParaRPr>
                     </a:p>
@@ -16640,7 +16653,10 @@
                   <a:tcPr anchor="b">
                     <a:lnL w="12700" cap="flat" cmpd="sng" algn="ctr">
                       <a:solidFill>
-                        <a:schemeClr val="tx1"/>
+                        <a:schemeClr val="tx1">
+                          <a:lumMod val="50000"/>
+                          <a:lumOff val="50000"/>
+                        </a:schemeClr>
                       </a:solidFill>
                       <a:prstDash val="solid"/>
                       <a:round/>
@@ -16649,7 +16665,10 @@
                     </a:lnL>
                     <a:lnR w="12700" cap="flat" cmpd="sng" algn="ctr">
                       <a:solidFill>
-                        <a:schemeClr val="tx1"/>
+                        <a:schemeClr val="tx1">
+                          <a:lumMod val="50000"/>
+                          <a:lumOff val="50000"/>
+                        </a:schemeClr>
                       </a:solidFill>
                       <a:prstDash val="solid"/>
                       <a:round/>
@@ -16658,7 +16677,10 @@
                     </a:lnR>
                     <a:lnT w="12700" cap="flat" cmpd="sng" algn="ctr">
                       <a:solidFill>
-                        <a:schemeClr val="tx1"/>
+                        <a:schemeClr val="tx1">
+                          <a:lumMod val="50000"/>
+                          <a:lumOff val="50000"/>
+                        </a:schemeClr>
                       </a:solidFill>
                       <a:prstDash val="solid"/>
                       <a:round/>
@@ -16667,7 +16689,10 @@
                     </a:lnT>
                     <a:lnB w="12700" cap="flat" cmpd="sng" algn="ctr">
                       <a:solidFill>
-                        <a:schemeClr val="tx1"/>
+                        <a:schemeClr val="tx1">
+                          <a:lumMod val="50000"/>
+                          <a:lumOff val="50000"/>
+                        </a:schemeClr>
                       </a:solidFill>
                       <a:prstDash val="solid"/>
                       <a:round/>
@@ -16675,7 +16700,7 @@
                       <a:tailEnd type="none" w="med" len="med"/>
                     </a:lnB>
                     <a:solidFill>
-                      <a:schemeClr val="tx1"/>
+                      <a:schemeClr val="accent1"/>
                     </a:solidFill>
                   </a:tcPr>
                 </a:tc>
@@ -16691,12 +16716,13 @@
                     <a:bodyPr/>
                     <a:lstStyle/>
                     <a:p>
+                      <a:pPr algn="ctr"/>
                       <a:r>
                         <a:rPr lang="en-US" altLang="zh-CN" sz="1400" b="0" dirty="0">
                           <a:solidFill>
                             <a:schemeClr val="tx1"/>
                           </a:solidFill>
-                          <a:latin typeface="Courier New" panose="02070309020205020404" pitchFamily="49" charset="0"/>
+                          <a:latin typeface="Montserrat" panose="00000500000000000000" pitchFamily="2" charset="0"/>
                           <a:cs typeface="Courier New" panose="02070309020205020404" pitchFamily="49" charset="0"/>
                         </a:rPr>
                         <a:t>Network layer</a:t>
@@ -16705,7 +16731,7 @@
                         <a:solidFill>
                           <a:schemeClr val="tx1"/>
                         </a:solidFill>
-                        <a:latin typeface="Courier New" panose="02070309020205020404" pitchFamily="49" charset="0"/>
+                        <a:latin typeface="Montserrat" panose="00000500000000000000" pitchFamily="2" charset="0"/>
                         <a:cs typeface="Courier New" panose="02070309020205020404" pitchFamily="49" charset="0"/>
                       </a:endParaRPr>
                     </a:p>
@@ -16713,7 +16739,10 @@
                   <a:tcPr anchor="ctr">
                     <a:lnL w="12700" cap="flat" cmpd="sng" algn="ctr">
                       <a:solidFill>
-                        <a:schemeClr val="tx1"/>
+                        <a:schemeClr val="tx1">
+                          <a:lumMod val="50000"/>
+                          <a:lumOff val="50000"/>
+                        </a:schemeClr>
                       </a:solidFill>
                       <a:prstDash val="solid"/>
                       <a:round/>
@@ -16722,7 +16751,10 @@
                     </a:lnL>
                     <a:lnR w="12700" cap="flat" cmpd="sng" algn="ctr">
                       <a:solidFill>
-                        <a:schemeClr val="tx1"/>
+                        <a:schemeClr val="tx1">
+                          <a:lumMod val="50000"/>
+                          <a:lumOff val="50000"/>
+                        </a:schemeClr>
                       </a:solidFill>
                       <a:prstDash val="solid"/>
                       <a:round/>
@@ -16731,7 +16763,10 @@
                     </a:lnR>
                     <a:lnT w="12700" cap="flat" cmpd="sng" algn="ctr">
                       <a:solidFill>
-                        <a:schemeClr val="tx1"/>
+                        <a:schemeClr val="tx1">
+                          <a:lumMod val="50000"/>
+                          <a:lumOff val="50000"/>
+                        </a:schemeClr>
                       </a:solidFill>
                       <a:prstDash val="solid"/>
                       <a:round/>
@@ -16740,7 +16775,10 @@
                     </a:lnT>
                     <a:lnB w="12700" cap="flat" cmpd="sng" algn="ctr">
                       <a:solidFill>
-                        <a:schemeClr val="tx1"/>
+                        <a:schemeClr val="tx1">
+                          <a:lumMod val="50000"/>
+                          <a:lumOff val="50000"/>
+                        </a:schemeClr>
                       </a:solidFill>
                       <a:prstDash val="solid"/>
                       <a:round/>
@@ -16762,12 +16800,13 @@
                     <a:bodyPr/>
                     <a:lstStyle/>
                     <a:p>
+                      <a:pPr algn="ctr"/>
                       <a:r>
                         <a:rPr lang="en-US" altLang="zh-CN" sz="1400" b="0" dirty="0">
                           <a:solidFill>
                             <a:schemeClr val="tx1"/>
                           </a:solidFill>
-                          <a:latin typeface="Courier New" panose="02070309020205020404" pitchFamily="49" charset="0"/>
+                          <a:latin typeface="Montserrat" panose="00000500000000000000" pitchFamily="2" charset="0"/>
                           <a:cs typeface="Courier New" panose="02070309020205020404" pitchFamily="49" charset="0"/>
                         </a:rPr>
                         <a:t>Link layer</a:t>
@@ -16776,7 +16815,7 @@
                         <a:solidFill>
                           <a:schemeClr val="tx1"/>
                         </a:solidFill>
-                        <a:latin typeface="Courier New" panose="02070309020205020404" pitchFamily="49" charset="0"/>
+                        <a:latin typeface="Montserrat" panose="00000500000000000000" pitchFamily="2" charset="0"/>
                         <a:cs typeface="Courier New" panose="02070309020205020404" pitchFamily="49" charset="0"/>
                       </a:endParaRPr>
                     </a:p>
@@ -16784,7 +16823,10 @@
                   <a:tcPr anchor="ctr">
                     <a:lnL w="12700" cap="flat" cmpd="sng" algn="ctr">
                       <a:solidFill>
-                        <a:schemeClr val="tx1"/>
+                        <a:schemeClr val="tx1">
+                          <a:lumMod val="50000"/>
+                          <a:lumOff val="50000"/>
+                        </a:schemeClr>
                       </a:solidFill>
                       <a:prstDash val="solid"/>
                       <a:round/>
@@ -16793,7 +16835,10 @@
                     </a:lnL>
                     <a:lnR w="12700" cap="flat" cmpd="sng" algn="ctr">
                       <a:solidFill>
-                        <a:schemeClr val="tx1"/>
+                        <a:schemeClr val="tx1">
+                          <a:lumMod val="50000"/>
+                          <a:lumOff val="50000"/>
+                        </a:schemeClr>
                       </a:solidFill>
                       <a:prstDash val="solid"/>
                       <a:round/>
@@ -16802,7 +16847,10 @@
                     </a:lnR>
                     <a:lnT w="12700" cap="flat" cmpd="sng" algn="ctr">
                       <a:solidFill>
-                        <a:schemeClr val="tx1"/>
+                        <a:schemeClr val="tx1">
+                          <a:lumMod val="50000"/>
+                          <a:lumOff val="50000"/>
+                        </a:schemeClr>
                       </a:solidFill>
                       <a:prstDash val="solid"/>
                       <a:round/>
@@ -16811,7 +16859,10 @@
                     </a:lnT>
                     <a:lnB w="12700" cap="flat" cmpd="sng" algn="ctr">
                       <a:solidFill>
-                        <a:schemeClr val="tx1"/>
+                        <a:schemeClr val="tx1">
+                          <a:lumMod val="50000"/>
+                          <a:lumOff val="50000"/>
+                        </a:schemeClr>
                       </a:solidFill>
                       <a:prstDash val="solid"/>
                       <a:round/>
@@ -16833,12 +16884,13 @@
                     <a:bodyPr/>
                     <a:lstStyle/>
                     <a:p>
+                      <a:pPr algn="ctr"/>
                       <a:r>
                         <a:rPr lang="en-US" altLang="zh-CN" sz="1400" b="0" dirty="0">
                           <a:solidFill>
                             <a:schemeClr val="tx1"/>
                           </a:solidFill>
-                          <a:latin typeface="Courier New" panose="02070309020205020404" pitchFamily="49" charset="0"/>
+                          <a:latin typeface="Montserrat" panose="00000500000000000000" pitchFamily="2" charset="0"/>
                           <a:cs typeface="Courier New" panose="02070309020205020404" pitchFamily="49" charset="0"/>
                         </a:rPr>
                         <a:t>Physical layer</a:t>
@@ -16847,7 +16899,7 @@
                         <a:solidFill>
                           <a:schemeClr val="tx1"/>
                         </a:solidFill>
-                        <a:latin typeface="Courier New" panose="02070309020205020404" pitchFamily="49" charset="0"/>
+                        <a:latin typeface="Montserrat" panose="00000500000000000000" pitchFamily="2" charset="0"/>
                         <a:cs typeface="Courier New" panose="02070309020205020404" pitchFamily="49" charset="0"/>
                       </a:endParaRPr>
                     </a:p>
@@ -16855,7 +16907,10 @@
                   <a:tcPr anchor="ctr">
                     <a:lnL w="12700" cap="flat" cmpd="sng" algn="ctr">
                       <a:solidFill>
-                        <a:schemeClr val="tx1"/>
+                        <a:schemeClr val="tx1">
+                          <a:lumMod val="50000"/>
+                          <a:lumOff val="50000"/>
+                        </a:schemeClr>
                       </a:solidFill>
                       <a:prstDash val="solid"/>
                       <a:round/>
@@ -16864,7 +16919,10 @@
                     </a:lnL>
                     <a:lnR w="12700" cap="flat" cmpd="sng" algn="ctr">
                       <a:solidFill>
-                        <a:schemeClr val="tx1"/>
+                        <a:schemeClr val="tx1">
+                          <a:lumMod val="50000"/>
+                          <a:lumOff val="50000"/>
+                        </a:schemeClr>
                       </a:solidFill>
                       <a:prstDash val="solid"/>
                       <a:round/>
@@ -16873,7 +16931,10 @@
                     </a:lnR>
                     <a:lnT w="12700" cap="flat" cmpd="sng" algn="ctr">
                       <a:solidFill>
-                        <a:schemeClr val="tx1"/>
+                        <a:schemeClr val="tx1">
+                          <a:lumMod val="50000"/>
+                          <a:lumOff val="50000"/>
+                        </a:schemeClr>
                       </a:solidFill>
                       <a:prstDash val="solid"/>
                       <a:round/>
@@ -16882,7 +16943,10 @@
                     </a:lnT>
                     <a:lnB w="12700" cap="flat" cmpd="sng" algn="ctr">
                       <a:solidFill>
-                        <a:schemeClr val="tx1"/>
+                        <a:schemeClr val="tx1">
+                          <a:lumMod val="50000"/>
+                          <a:lumOff val="50000"/>
+                        </a:schemeClr>
                       </a:solidFill>
                       <a:prstDash val="solid"/>
                       <a:round/>
@@ -16918,7 +16982,7 @@
         </p:nvSpPr>
         <p:spPr>
           <a:xfrm>
-            <a:off x="4554114" y="1873707"/>
+            <a:off x="4554114" y="1787982"/>
             <a:ext cx="432000" cy="432000"/>
           </a:xfrm>
           <a:prstGeom prst="ellipse">
@@ -16951,20 +17015,20 @@
           <a:p>
             <a:pPr algn="ctr"/>
             <a:r>
-              <a:rPr lang="en-US" altLang="zh-CN" sz="1200" dirty="0">
+              <a:rPr lang="en-US" altLang="zh-CN" sz="1100" dirty="0">
                 <a:solidFill>
                   <a:sysClr val="windowText" lastClr="000000"/>
                 </a:solidFill>
-                <a:latin typeface="Courier New" panose="02070309020205020404" pitchFamily="49" charset="0"/>
+                <a:latin typeface="Montserrat" panose="00000500000000000000" pitchFamily="2" charset="0"/>
                 <a:cs typeface="Courier New" panose="02070309020205020404" pitchFamily="49" charset="0"/>
               </a:rPr>
               <a:t>AP1</a:t>
             </a:r>
-            <a:endParaRPr lang="zh-CN" altLang="en-US" sz="1200" dirty="0">
+            <a:endParaRPr lang="zh-CN" altLang="en-US" sz="1100" dirty="0">
               <a:solidFill>
                 <a:sysClr val="windowText" lastClr="000000"/>
               </a:solidFill>
-              <a:latin typeface="Courier New" panose="02070309020205020404" pitchFamily="49" charset="0"/>
+              <a:latin typeface="Montserrat" panose="00000500000000000000" pitchFamily="2" charset="0"/>
               <a:cs typeface="Courier New" panose="02070309020205020404" pitchFamily="49" charset="0"/>
             </a:endParaRPr>
           </a:p>
@@ -16986,7 +17050,7 @@
         </p:nvSpPr>
         <p:spPr>
           <a:xfrm>
-            <a:off x="3332191" y="2003982"/>
+            <a:off x="3332191" y="1787982"/>
             <a:ext cx="432000" cy="432000"/>
           </a:xfrm>
           <a:prstGeom prst="ellipse">
@@ -17019,20 +17083,20 @@
           <a:p>
             <a:pPr algn="ctr"/>
             <a:r>
-              <a:rPr lang="en-US" altLang="zh-CN" sz="1200" dirty="0">
+              <a:rPr lang="en-US" altLang="zh-CN" sz="1100" dirty="0">
                 <a:solidFill>
                   <a:sysClr val="windowText" lastClr="000000"/>
                 </a:solidFill>
-                <a:latin typeface="Courier New" panose="02070309020205020404" pitchFamily="49" charset="0"/>
+                <a:latin typeface="Montserrat" panose="00000500000000000000" pitchFamily="2" charset="0"/>
                 <a:cs typeface="Courier New" panose="02070309020205020404" pitchFamily="49" charset="0"/>
               </a:rPr>
               <a:t>AP4</a:t>
             </a:r>
-            <a:endParaRPr lang="zh-CN" altLang="en-US" sz="1200" dirty="0">
+            <a:endParaRPr lang="zh-CN" altLang="en-US" sz="1100" dirty="0">
               <a:solidFill>
                 <a:sysClr val="windowText" lastClr="000000"/>
               </a:solidFill>
-              <a:latin typeface="Courier New" panose="02070309020205020404" pitchFamily="49" charset="0"/>
+              <a:latin typeface="Montserrat" panose="00000500000000000000" pitchFamily="2" charset="0"/>
               <a:cs typeface="Courier New" panose="02070309020205020404" pitchFamily="49" charset="0"/>
             </a:endParaRPr>
           </a:p>
@@ -17087,20 +17151,20 @@
           <a:p>
             <a:pPr algn="ctr"/>
             <a:r>
-              <a:rPr lang="en-US" altLang="zh-CN" sz="1200" dirty="0">
+              <a:rPr lang="en-US" altLang="zh-CN" sz="1100" dirty="0">
                 <a:solidFill>
                   <a:sysClr val="windowText" lastClr="000000"/>
                 </a:solidFill>
-                <a:latin typeface="Courier New" panose="02070309020205020404" pitchFamily="49" charset="0"/>
+                <a:latin typeface="Montserrat" panose="00000500000000000000" pitchFamily="2" charset="0"/>
                 <a:cs typeface="Courier New" panose="02070309020205020404" pitchFamily="49" charset="0"/>
               </a:rPr>
               <a:t>AP3</a:t>
             </a:r>
-            <a:endParaRPr lang="zh-CN" altLang="en-US" sz="1200" dirty="0">
+            <a:endParaRPr lang="zh-CN" altLang="en-US" sz="1100" dirty="0">
               <a:solidFill>
                 <a:sysClr val="windowText" lastClr="000000"/>
               </a:solidFill>
-              <a:latin typeface="Courier New" panose="02070309020205020404" pitchFamily="49" charset="0"/>
+              <a:latin typeface="Montserrat" panose="00000500000000000000" pitchFamily="2" charset="0"/>
               <a:cs typeface="Courier New" panose="02070309020205020404" pitchFamily="49" charset="0"/>
             </a:endParaRPr>
           </a:p>
@@ -17120,8 +17184,8 @@
         </p:nvSpPr>
         <p:spPr>
           <a:xfrm>
-            <a:off x="2736792" y="3527604"/>
-            <a:ext cx="1063399" cy="320496"/>
+            <a:off x="2736791" y="3248193"/>
+            <a:ext cx="1080000" cy="432000"/>
           </a:xfrm>
           <a:prstGeom prst="rect">
             <a:avLst/>
@@ -17159,7 +17223,7 @@
                 <a:solidFill>
                   <a:schemeClr val="tx1"/>
                 </a:solidFill>
-                <a:latin typeface="Courier New" panose="02070309020205020404" pitchFamily="49" charset="0"/>
+                <a:latin typeface="Montserrat" panose="00000500000000000000" pitchFamily="2" charset="0"/>
                 <a:cs typeface="Courier New" panose="02070309020205020404" pitchFamily="49" charset="0"/>
               </a:rPr>
               <a:t>UDP</a:t>
@@ -17168,7 +17232,7 @@
               <a:solidFill>
                 <a:schemeClr val="tx1"/>
               </a:solidFill>
-              <a:latin typeface="Courier New" panose="02070309020205020404" pitchFamily="49" charset="0"/>
+              <a:latin typeface="Montserrat" panose="00000500000000000000" pitchFamily="2" charset="0"/>
               <a:cs typeface="Courier New" panose="02070309020205020404" pitchFamily="49" charset="0"/>
             </a:endParaRPr>
           </a:p>
@@ -17188,8 +17252,8 @@
         </p:nvSpPr>
         <p:spPr>
           <a:xfrm>
-            <a:off x="3958714" y="3527604"/>
-            <a:ext cx="1063399" cy="320496"/>
+            <a:off x="3958713" y="3248193"/>
+            <a:ext cx="1080000" cy="432000"/>
           </a:xfrm>
           <a:prstGeom prst="rect">
             <a:avLst/>
@@ -17227,7 +17291,7 @@
                 <a:solidFill>
                   <a:schemeClr val="tx1"/>
                 </a:solidFill>
-                <a:latin typeface="Courier New" panose="02070309020205020404" pitchFamily="49" charset="0"/>
+                <a:latin typeface="Montserrat" panose="00000500000000000000" pitchFamily="2" charset="0"/>
                 <a:cs typeface="Courier New" panose="02070309020205020404" pitchFamily="49" charset="0"/>
               </a:rPr>
               <a:t>TCP</a:t>
@@ -17236,7 +17300,7 @@
               <a:solidFill>
                 <a:schemeClr val="tx1"/>
               </a:solidFill>
-              <a:latin typeface="Courier New" panose="02070309020205020404" pitchFamily="49" charset="0"/>
+              <a:latin typeface="Montserrat" panose="00000500000000000000" pitchFamily="2" charset="0"/>
               <a:cs typeface="Courier New" panose="02070309020205020404" pitchFamily="49" charset="0"/>
             </a:endParaRPr>
           </a:p>
@@ -17256,17 +17320,18 @@
         </p:nvSpPr>
         <p:spPr>
           <a:xfrm>
-            <a:off x="2736792" y="2749629"/>
+            <a:off x="2736792" y="2504086"/>
             <a:ext cx="504000" cy="216000"/>
           </a:xfrm>
           <a:prstGeom prst="rect">
             <a:avLst/>
           </a:prstGeom>
-          <a:solidFill>
-            <a:schemeClr val="bg1"/>
-          </a:solidFill>
-          <a:ln>
-            <a:noFill/>
+          <a:noFill/>
+          <a:ln w="6350">
+            <a:solidFill>
+              <a:schemeClr val="bg1"/>
+            </a:solidFill>
+            <a:prstDash val="lgDash"/>
           </a:ln>
         </p:spPr>
         <p:style>
@@ -17291,20 +17356,20 @@
           <a:p>
             <a:pPr algn="ctr"/>
             <a:r>
-              <a:rPr lang="en-US" altLang="zh-CN" sz="1200" dirty="0">
+              <a:rPr lang="en-US" altLang="zh-CN" sz="1100" dirty="0">
                 <a:solidFill>
-                  <a:schemeClr val="tx1"/>
+                  <a:schemeClr val="bg1"/>
                 </a:solidFill>
-                <a:latin typeface="Courier New" panose="02070309020205020404" pitchFamily="49" charset="0"/>
+                <a:latin typeface="Montserrat" panose="00000500000000000000" pitchFamily="2" charset="0"/>
                 <a:cs typeface="Courier New" panose="02070309020205020404" pitchFamily="49" charset="0"/>
               </a:rPr>
               <a:t>port</a:t>
             </a:r>
-            <a:endParaRPr lang="zh-CN" altLang="en-US" sz="1200" dirty="0">
+            <a:endParaRPr lang="zh-CN" altLang="en-US" sz="1100" dirty="0">
               <a:solidFill>
-                <a:schemeClr val="tx1"/>
+                <a:schemeClr val="bg1"/>
               </a:solidFill>
-              <a:latin typeface="Courier New" panose="02070309020205020404" pitchFamily="49" charset="0"/>
+              <a:latin typeface="Montserrat" panose="00000500000000000000" pitchFamily="2" charset="0"/>
               <a:cs typeface="Courier New" panose="02070309020205020404" pitchFamily="49" charset="0"/>
             </a:endParaRPr>
           </a:p>
@@ -17324,17 +17389,18 @@
         </p:nvSpPr>
         <p:spPr>
           <a:xfrm>
-            <a:off x="3296191" y="2746533"/>
+            <a:off x="3296191" y="2500990"/>
             <a:ext cx="504000" cy="216000"/>
           </a:xfrm>
           <a:prstGeom prst="rect">
             <a:avLst/>
           </a:prstGeom>
-          <a:solidFill>
-            <a:schemeClr val="bg1"/>
-          </a:solidFill>
-          <a:ln>
-            <a:noFill/>
+          <a:noFill/>
+          <a:ln w="6350">
+            <a:solidFill>
+              <a:schemeClr val="bg1"/>
+            </a:solidFill>
+            <a:prstDash val="lgDash"/>
           </a:ln>
         </p:spPr>
         <p:style>
@@ -17359,20 +17425,20 @@
           <a:p>
             <a:pPr algn="ctr"/>
             <a:r>
-              <a:rPr lang="en-US" altLang="zh-CN" sz="1200" dirty="0">
+              <a:rPr lang="en-US" altLang="zh-CN" sz="1100" dirty="0">
                 <a:solidFill>
-                  <a:schemeClr val="tx1"/>
+                  <a:schemeClr val="bg1"/>
                 </a:solidFill>
-                <a:latin typeface="Courier New" panose="02070309020205020404" pitchFamily="49" charset="0"/>
+                <a:latin typeface="Montserrat" panose="00000500000000000000" pitchFamily="2" charset="0"/>
                 <a:cs typeface="Courier New" panose="02070309020205020404" pitchFamily="49" charset="0"/>
               </a:rPr>
               <a:t>port</a:t>
             </a:r>
-            <a:endParaRPr lang="zh-CN" altLang="en-US" sz="1200" dirty="0">
+            <a:endParaRPr lang="zh-CN" altLang="en-US" sz="1100" dirty="0">
               <a:solidFill>
-                <a:schemeClr val="tx1"/>
+                <a:schemeClr val="bg1"/>
               </a:solidFill>
-              <a:latin typeface="Courier New" panose="02070309020205020404" pitchFamily="49" charset="0"/>
+              <a:latin typeface="Montserrat" panose="00000500000000000000" pitchFamily="2" charset="0"/>
               <a:cs typeface="Courier New" panose="02070309020205020404" pitchFamily="49" charset="0"/>
             </a:endParaRPr>
           </a:p>
@@ -17392,17 +17458,18 @@
         </p:nvSpPr>
         <p:spPr>
           <a:xfrm>
-            <a:off x="4518114" y="2739114"/>
+            <a:off x="4518114" y="2493571"/>
             <a:ext cx="504000" cy="216000"/>
           </a:xfrm>
           <a:prstGeom prst="rect">
             <a:avLst/>
           </a:prstGeom>
-          <a:solidFill>
-            <a:schemeClr val="bg1"/>
-          </a:solidFill>
-          <a:ln>
-            <a:noFill/>
+          <a:noFill/>
+          <a:ln w="6350">
+            <a:solidFill>
+              <a:schemeClr val="bg1"/>
+            </a:solidFill>
+            <a:prstDash val="lgDash"/>
           </a:ln>
         </p:spPr>
         <p:style>
@@ -17427,20 +17494,20 @@
           <a:p>
             <a:pPr algn="ctr"/>
             <a:r>
-              <a:rPr lang="en-US" altLang="zh-CN" sz="1200" dirty="0">
+              <a:rPr lang="en-US" altLang="zh-CN" sz="1100" dirty="0">
                 <a:solidFill>
-                  <a:schemeClr val="tx1"/>
+                  <a:schemeClr val="bg1"/>
                 </a:solidFill>
-                <a:latin typeface="Courier New" panose="02070309020205020404" pitchFamily="49" charset="0"/>
+                <a:latin typeface="Montserrat" panose="00000500000000000000" pitchFamily="2" charset="0"/>
                 <a:cs typeface="Courier New" panose="02070309020205020404" pitchFamily="49" charset="0"/>
               </a:rPr>
               <a:t>port</a:t>
             </a:r>
-            <a:endParaRPr lang="zh-CN" altLang="en-US" sz="1200" dirty="0">
+            <a:endParaRPr lang="zh-CN" altLang="en-US" sz="1100" dirty="0">
               <a:solidFill>
-                <a:schemeClr val="tx1"/>
+                <a:schemeClr val="bg1"/>
               </a:solidFill>
-              <a:latin typeface="Courier New" panose="02070309020205020404" pitchFamily="49" charset="0"/>
+              <a:latin typeface="Montserrat" panose="00000500000000000000" pitchFamily="2" charset="0"/>
               <a:cs typeface="Courier New" panose="02070309020205020404" pitchFamily="49" charset="0"/>
             </a:endParaRPr>
           </a:p>
@@ -17462,7 +17529,7 @@
         </p:nvSpPr>
         <p:spPr>
           <a:xfrm>
-            <a:off x="3996677" y="1802688"/>
+            <a:off x="3996677" y="1787982"/>
             <a:ext cx="432000" cy="432000"/>
           </a:xfrm>
           <a:prstGeom prst="ellipse">
@@ -17495,20 +17562,20 @@
           <a:p>
             <a:pPr algn="ctr"/>
             <a:r>
-              <a:rPr lang="en-US" altLang="zh-CN" sz="1200" dirty="0">
+              <a:rPr lang="en-US" altLang="zh-CN" sz="1100" dirty="0">
                 <a:solidFill>
                   <a:sysClr val="windowText" lastClr="000000"/>
                 </a:solidFill>
-                <a:latin typeface="Courier New" panose="02070309020205020404" pitchFamily="49" charset="0"/>
+                <a:latin typeface="Montserrat" panose="00000500000000000000" pitchFamily="2" charset="0"/>
                 <a:cs typeface="Courier New" panose="02070309020205020404" pitchFamily="49" charset="0"/>
               </a:rPr>
               <a:t>AP2</a:t>
             </a:r>
-            <a:endParaRPr lang="zh-CN" altLang="en-US" sz="1200" dirty="0">
+            <a:endParaRPr lang="zh-CN" altLang="en-US" sz="1100" dirty="0">
               <a:solidFill>
                 <a:sysClr val="windowText" lastClr="000000"/>
               </a:solidFill>
-              <a:latin typeface="Courier New" panose="02070309020205020404" pitchFamily="49" charset="0"/>
+              <a:latin typeface="Montserrat" panose="00000500000000000000" pitchFamily="2" charset="0"/>
               <a:cs typeface="Courier New" panose="02070309020205020404" pitchFamily="49" charset="0"/>
             </a:endParaRPr>
           </a:p>
@@ -17528,17 +17595,18 @@
         </p:nvSpPr>
         <p:spPr>
           <a:xfrm>
-            <a:off x="3960677" y="2739114"/>
+            <a:off x="3960677" y="2493571"/>
             <a:ext cx="504000" cy="216000"/>
           </a:xfrm>
           <a:prstGeom prst="rect">
             <a:avLst/>
           </a:prstGeom>
-          <a:solidFill>
-            <a:schemeClr val="bg1"/>
-          </a:solidFill>
-          <a:ln>
-            <a:noFill/>
+          <a:noFill/>
+          <a:ln w="6350">
+            <a:solidFill>
+              <a:schemeClr val="bg1"/>
+            </a:solidFill>
+            <a:prstDash val="lgDash"/>
           </a:ln>
         </p:spPr>
         <p:style>
@@ -17563,20 +17631,20 @@
           <a:p>
             <a:pPr algn="ctr"/>
             <a:r>
-              <a:rPr lang="en-US" altLang="zh-CN" sz="1200" dirty="0">
+              <a:rPr lang="en-US" altLang="zh-CN" sz="1100" dirty="0">
                 <a:solidFill>
-                  <a:schemeClr val="tx1"/>
+                  <a:schemeClr val="bg1"/>
                 </a:solidFill>
-                <a:latin typeface="Courier New" panose="02070309020205020404" pitchFamily="49" charset="0"/>
+                <a:latin typeface="Montserrat" panose="00000500000000000000" pitchFamily="2" charset="0"/>
                 <a:cs typeface="Courier New" panose="02070309020205020404" pitchFamily="49" charset="0"/>
               </a:rPr>
               <a:t>port</a:t>
             </a:r>
-            <a:endParaRPr lang="zh-CN" altLang="en-US" sz="1200" dirty="0">
+            <a:endParaRPr lang="zh-CN" altLang="en-US" sz="1100" dirty="0">
               <a:solidFill>
-                <a:schemeClr val="tx1"/>
+                <a:schemeClr val="bg1"/>
               </a:solidFill>
-              <a:latin typeface="Courier New" panose="02070309020205020404" pitchFamily="49" charset="0"/>
+              <a:latin typeface="Montserrat" panose="00000500000000000000" pitchFamily="2" charset="0"/>
               <a:cs typeface="Courier New" panose="02070309020205020404" pitchFamily="49" charset="0"/>
             </a:endParaRPr>
           </a:p>
@@ -17598,16 +17666,16 @@
           <p:nvPr/>
         </p:nvCxnSpPr>
         <p:spPr>
-          <a:xfrm flipH="1">
-            <a:off x="4770114" y="2305707"/>
-            <a:ext cx="1" cy="433407"/>
+          <a:xfrm>
+            <a:off x="4770114" y="2219982"/>
+            <a:ext cx="0" cy="273589"/>
           </a:xfrm>
           <a:prstGeom prst="straightConnector1">
             <a:avLst/>
           </a:prstGeom>
           <a:ln w="38100">
             <a:solidFill>
-              <a:srgbClr val="FF0000"/>
+              <a:schemeClr val="tx1"/>
             </a:solidFill>
             <a:tailEnd type="triangle"/>
           </a:ln>
@@ -17645,15 +17713,15 @@
         </p:nvCxnSpPr>
         <p:spPr>
           <a:xfrm>
-            <a:off x="4212677" y="2234688"/>
-            <a:ext cx="0" cy="504426"/>
+            <a:off x="4212677" y="2219982"/>
+            <a:ext cx="0" cy="273589"/>
           </a:xfrm>
           <a:prstGeom prst="straightConnector1">
             <a:avLst/>
           </a:prstGeom>
           <a:ln w="38100">
             <a:solidFill>
-              <a:srgbClr val="FF0000"/>
+              <a:schemeClr val="tx1"/>
             </a:solidFill>
             <a:tailEnd type="triangle"/>
           </a:ln>
@@ -17690,15 +17758,15 @@
         </p:nvCxnSpPr>
         <p:spPr>
           <a:xfrm>
-            <a:off x="3548191" y="2435982"/>
-            <a:ext cx="0" cy="310551"/>
+            <a:off x="3548191" y="2219982"/>
+            <a:ext cx="0" cy="281008"/>
           </a:xfrm>
           <a:prstGeom prst="straightConnector1">
             <a:avLst/>
           </a:prstGeom>
           <a:ln w="38100">
             <a:solidFill>
-              <a:srgbClr val="FF0000"/>
+              <a:schemeClr val="tx1"/>
             </a:solidFill>
             <a:tailEnd type="triangle"/>
           </a:ln>
@@ -17735,15 +17803,15 @@
         </p:nvCxnSpPr>
         <p:spPr>
           <a:xfrm>
-            <a:off x="2981325" y="2219982"/>
-            <a:ext cx="7467" cy="529647"/>
+            <a:off x="2988792" y="2234688"/>
+            <a:ext cx="0" cy="269398"/>
           </a:xfrm>
           <a:prstGeom prst="straightConnector1">
             <a:avLst/>
           </a:prstGeom>
           <a:ln w="38100">
             <a:solidFill>
-              <a:srgbClr val="FF0000"/>
+              <a:schemeClr val="tx1"/>
             </a:solidFill>
             <a:tailEnd type="triangle"/>
           </a:ln>
@@ -17780,15 +17848,15 @@
         </p:nvCxnSpPr>
         <p:spPr>
           <a:xfrm flipH="1">
-            <a:off x="2981325" y="2965629"/>
-            <a:ext cx="7467" cy="561975"/>
+            <a:off x="2981325" y="2720086"/>
+            <a:ext cx="7467" cy="432000"/>
           </a:xfrm>
           <a:prstGeom prst="straightConnector1">
             <a:avLst/>
           </a:prstGeom>
           <a:ln w="38100">
             <a:solidFill>
-              <a:srgbClr val="FF0000"/>
+              <a:schemeClr val="tx1"/>
             </a:solidFill>
             <a:tailEnd type="triangle"/>
           </a:ln>
@@ -17825,15 +17893,15 @@
         </p:nvCxnSpPr>
         <p:spPr>
           <a:xfrm flipH="1">
-            <a:off x="3540724" y="2962533"/>
-            <a:ext cx="7467" cy="561975"/>
+            <a:off x="3540724" y="2716990"/>
+            <a:ext cx="7467" cy="432000"/>
           </a:xfrm>
           <a:prstGeom prst="straightConnector1">
             <a:avLst/>
           </a:prstGeom>
           <a:ln w="38100">
             <a:solidFill>
-              <a:srgbClr val="FF0000"/>
+              <a:schemeClr val="tx1"/>
             </a:solidFill>
             <a:tailEnd type="triangle"/>
           </a:ln>
@@ -17870,15 +17938,15 @@
         </p:nvCxnSpPr>
         <p:spPr>
           <a:xfrm>
-            <a:off x="4212677" y="2955114"/>
-            <a:ext cx="0" cy="569394"/>
+            <a:off x="4212677" y="2709571"/>
+            <a:ext cx="0" cy="432000"/>
           </a:xfrm>
           <a:prstGeom prst="straightConnector1">
             <a:avLst/>
           </a:prstGeom>
           <a:ln w="38100">
             <a:solidFill>
-              <a:srgbClr val="FF0000"/>
+              <a:schemeClr val="tx1"/>
             </a:solidFill>
             <a:tailEnd type="triangle"/>
           </a:ln>
@@ -17915,15 +17983,15 @@
         </p:nvCxnSpPr>
         <p:spPr>
           <a:xfrm flipH="1">
-            <a:off x="4770113" y="2955114"/>
-            <a:ext cx="1" cy="569394"/>
+            <a:off x="4770113" y="2709571"/>
+            <a:ext cx="1" cy="432000"/>
           </a:xfrm>
           <a:prstGeom prst="straightConnector1">
             <a:avLst/>
           </a:prstGeom>
           <a:ln w="38100">
             <a:solidFill>
-              <a:srgbClr val="FF0000"/>
+              <a:schemeClr val="tx1"/>
             </a:solidFill>
             <a:tailEnd type="triangle"/>
           </a:ln>
@@ -17963,11 +18031,12 @@
           <a:prstGeom prst="rect">
             <a:avLst/>
           </a:prstGeom>
-          <a:solidFill>
-            <a:schemeClr val="bg1"/>
-          </a:solidFill>
-          <a:ln>
-            <a:noFill/>
+          <a:noFill/>
+          <a:ln w="6350">
+            <a:solidFill>
+              <a:schemeClr val="bg1"/>
+            </a:solidFill>
+            <a:prstDash val="lgDash"/>
           </a:ln>
         </p:spPr>
         <p:style>
@@ -17992,20 +18061,20 @@
           <a:p>
             <a:pPr algn="ctr"/>
             <a:r>
-              <a:rPr lang="en-US" altLang="zh-CN" sz="1400" dirty="0">
+              <a:rPr lang="en-US" altLang="zh-CN" sz="1200" dirty="0">
                 <a:solidFill>
-                  <a:schemeClr val="tx1"/>
+                  <a:schemeClr val="bg1"/>
                 </a:solidFill>
-                <a:latin typeface="Courier New" panose="02070309020205020404" pitchFamily="49" charset="0"/>
+                <a:latin typeface="Montserrat" panose="00000500000000000000" pitchFamily="2" charset="0"/>
                 <a:cs typeface="Courier New" panose="02070309020205020404" pitchFamily="49" charset="0"/>
               </a:rPr>
               <a:t>Multiplexing</a:t>
             </a:r>
-            <a:endParaRPr lang="zh-CN" altLang="en-US" sz="1400" dirty="0">
+            <a:endParaRPr lang="zh-CN" altLang="en-US" sz="1200" dirty="0">
               <a:solidFill>
-                <a:schemeClr val="tx1"/>
+                <a:schemeClr val="bg1"/>
               </a:solidFill>
-              <a:latin typeface="Courier New" panose="02070309020205020404" pitchFamily="49" charset="0"/>
+              <a:latin typeface="Montserrat" panose="00000500000000000000" pitchFamily="2" charset="0"/>
               <a:cs typeface="Courier New" panose="02070309020205020404" pitchFamily="49" charset="0"/>
             </a:endParaRPr>
           </a:p>
@@ -18027,15 +18096,15 @@
         </p:nvCxnSpPr>
         <p:spPr>
           <a:xfrm>
-            <a:off x="3296191" y="3848100"/>
-            <a:ext cx="0" cy="381996"/>
+            <a:off x="3296191" y="3763430"/>
+            <a:ext cx="0" cy="432000"/>
           </a:xfrm>
           <a:prstGeom prst="straightConnector1">
             <a:avLst/>
           </a:prstGeom>
           <a:ln w="38100">
             <a:solidFill>
-              <a:srgbClr val="FF0000"/>
+              <a:schemeClr val="tx1"/>
             </a:solidFill>
             <a:tailEnd type="triangle"/>
           </a:ln>
@@ -18071,15 +18140,15 @@
         </p:nvCxnSpPr>
         <p:spPr>
           <a:xfrm>
-            <a:off x="4518114" y="3848100"/>
-            <a:ext cx="0" cy="381996"/>
+            <a:off x="4518114" y="3763430"/>
+            <a:ext cx="0" cy="432000"/>
           </a:xfrm>
           <a:prstGeom prst="straightConnector1">
             <a:avLst/>
           </a:prstGeom>
           <a:ln w="38100">
             <a:solidFill>
-              <a:srgbClr val="FF0000"/>
+              <a:schemeClr val="tx1"/>
             </a:solidFill>
             <a:tailEnd type="triangle"/>
           </a:ln>
@@ -18121,7 +18190,7 @@
           </a:prstGeom>
           <a:ln w="38100">
             <a:solidFill>
-              <a:srgbClr val="FF0000"/>
+              <a:schemeClr val="tx1"/>
             </a:solidFill>
             <a:tailEnd type="triangle"/>
           </a:ln>
@@ -18156,7 +18225,7 @@
           <p:nvPr>
             <p:extLst>
               <p:ext uri="{D42A27DB-BD31-4B8C-83A1-F6EECF244321}">
-                <p14:modId xmlns:p14="http://schemas.microsoft.com/office/powerpoint/2010/main" val="1107425693"/>
+                <p14:modId xmlns:p14="http://schemas.microsoft.com/office/powerpoint/2010/main" val="3703053376"/>
               </p:ext>
             </p:extLst>
           </p:nvPr>
@@ -18186,12 +18255,13 @@
                     <a:bodyPr/>
                     <a:lstStyle/>
                     <a:p>
+                      <a:pPr algn="ctr"/>
                       <a:r>
                         <a:rPr lang="en-US" altLang="zh-CN" sz="1400" b="0" dirty="0">
                           <a:solidFill>
                             <a:schemeClr val="tx1"/>
                           </a:solidFill>
-                          <a:latin typeface="Courier New" panose="02070309020205020404" pitchFamily="49" charset="0"/>
+                          <a:latin typeface="Montserrat" panose="00000500000000000000" pitchFamily="2" charset="0"/>
                           <a:cs typeface="Courier New" panose="02070309020205020404" pitchFamily="49" charset="0"/>
                         </a:rPr>
                         <a:t>Application layer</a:t>
@@ -18200,7 +18270,7 @@
                         <a:solidFill>
                           <a:schemeClr val="tx1"/>
                         </a:solidFill>
-                        <a:latin typeface="Courier New" panose="02070309020205020404" pitchFamily="49" charset="0"/>
+                        <a:latin typeface="Montserrat" panose="00000500000000000000" pitchFamily="2" charset="0"/>
                         <a:cs typeface="Courier New" panose="02070309020205020404" pitchFamily="49" charset="0"/>
                       </a:endParaRPr>
                     </a:p>
@@ -18208,7 +18278,10 @@
                   <a:tcPr>
                     <a:lnL w="12700" cap="flat" cmpd="sng" algn="ctr">
                       <a:solidFill>
-                        <a:schemeClr val="tx1"/>
+                        <a:schemeClr val="tx1">
+                          <a:lumMod val="50000"/>
+                          <a:lumOff val="50000"/>
+                        </a:schemeClr>
                       </a:solidFill>
                       <a:prstDash val="solid"/>
                       <a:round/>
@@ -18217,7 +18290,10 @@
                     </a:lnL>
                     <a:lnR w="12700" cap="flat" cmpd="sng" algn="ctr">
                       <a:solidFill>
-                        <a:schemeClr val="tx1"/>
+                        <a:schemeClr val="tx1">
+                          <a:lumMod val="50000"/>
+                          <a:lumOff val="50000"/>
+                        </a:schemeClr>
                       </a:solidFill>
                       <a:prstDash val="solid"/>
                       <a:round/>
@@ -18226,7 +18302,10 @@
                     </a:lnR>
                     <a:lnT w="12700" cap="flat" cmpd="sng" algn="ctr">
                       <a:solidFill>
-                        <a:schemeClr val="tx1"/>
+                        <a:schemeClr val="tx1">
+                          <a:lumMod val="50000"/>
+                          <a:lumOff val="50000"/>
+                        </a:schemeClr>
                       </a:solidFill>
                       <a:prstDash val="solid"/>
                       <a:round/>
@@ -18235,7 +18314,10 @@
                     </a:lnT>
                     <a:lnB w="12700" cap="flat" cmpd="sng" algn="ctr">
                       <a:solidFill>
-                        <a:schemeClr val="tx1"/>
+                        <a:schemeClr val="tx1">
+                          <a:lumMod val="50000"/>
+                          <a:lumOff val="50000"/>
+                        </a:schemeClr>
                       </a:solidFill>
                       <a:prstDash val="solid"/>
                       <a:round/>
@@ -18262,7 +18344,7 @@
                           <a:solidFill>
                             <a:schemeClr val="bg1"/>
                           </a:solidFill>
-                          <a:latin typeface="Courier New" panose="02070309020205020404" pitchFamily="49" charset="0"/>
+                          <a:latin typeface="Montserrat" panose="00000500000000000000" pitchFamily="2" charset="0"/>
                           <a:cs typeface="Courier New" panose="02070309020205020404" pitchFamily="49" charset="0"/>
                         </a:rPr>
                         <a:t>Transport layer</a:t>
@@ -18271,7 +18353,7 @@
                         <a:solidFill>
                           <a:schemeClr val="bg1"/>
                         </a:solidFill>
-                        <a:latin typeface="Courier New" panose="02070309020205020404" pitchFamily="49" charset="0"/>
+                        <a:latin typeface="Montserrat" panose="00000500000000000000" pitchFamily="2" charset="0"/>
                         <a:cs typeface="Courier New" panose="02070309020205020404" pitchFamily="49" charset="0"/>
                       </a:endParaRPr>
                     </a:p>
@@ -18279,7 +18361,10 @@
                   <a:tcPr anchor="b">
                     <a:lnL w="12700" cap="flat" cmpd="sng" algn="ctr">
                       <a:solidFill>
-                        <a:schemeClr val="tx1"/>
+                        <a:schemeClr val="tx1">
+                          <a:lumMod val="50000"/>
+                          <a:lumOff val="50000"/>
+                        </a:schemeClr>
                       </a:solidFill>
                       <a:prstDash val="solid"/>
                       <a:round/>
@@ -18288,7 +18373,10 @@
                     </a:lnL>
                     <a:lnR w="12700" cap="flat" cmpd="sng" algn="ctr">
                       <a:solidFill>
-                        <a:schemeClr val="tx1"/>
+                        <a:schemeClr val="tx1">
+                          <a:lumMod val="50000"/>
+                          <a:lumOff val="50000"/>
+                        </a:schemeClr>
                       </a:solidFill>
                       <a:prstDash val="solid"/>
                       <a:round/>
@@ -18297,7 +18385,10 @@
                     </a:lnR>
                     <a:lnT w="12700" cap="flat" cmpd="sng" algn="ctr">
                       <a:solidFill>
-                        <a:schemeClr val="tx1"/>
+                        <a:schemeClr val="tx1">
+                          <a:lumMod val="50000"/>
+                          <a:lumOff val="50000"/>
+                        </a:schemeClr>
                       </a:solidFill>
                       <a:prstDash val="solid"/>
                       <a:round/>
@@ -18306,7 +18397,10 @@
                     </a:lnT>
                     <a:lnB w="12700" cap="flat" cmpd="sng" algn="ctr">
                       <a:solidFill>
-                        <a:schemeClr val="tx1"/>
+                        <a:schemeClr val="tx1">
+                          <a:lumMod val="50000"/>
+                          <a:lumOff val="50000"/>
+                        </a:schemeClr>
                       </a:solidFill>
                       <a:prstDash val="solid"/>
                       <a:round/>
@@ -18314,7 +18408,7 @@
                       <a:tailEnd type="none" w="med" len="med"/>
                     </a:lnB>
                     <a:solidFill>
-                      <a:schemeClr val="tx1"/>
+                      <a:schemeClr val="accent1"/>
                     </a:solidFill>
                   </a:tcPr>
                 </a:tc>
@@ -18330,12 +18424,13 @@
                     <a:bodyPr/>
                     <a:lstStyle/>
                     <a:p>
+                      <a:pPr algn="ctr"/>
                       <a:r>
                         <a:rPr lang="en-US" altLang="zh-CN" sz="1400" b="0" dirty="0">
                           <a:solidFill>
                             <a:schemeClr val="tx1"/>
                           </a:solidFill>
-                          <a:latin typeface="Courier New" panose="02070309020205020404" pitchFamily="49" charset="0"/>
+                          <a:latin typeface="Montserrat" panose="00000500000000000000" pitchFamily="2" charset="0"/>
                           <a:cs typeface="Courier New" panose="02070309020205020404" pitchFamily="49" charset="0"/>
                         </a:rPr>
                         <a:t>Network layer</a:t>
@@ -18344,7 +18439,7 @@
                         <a:solidFill>
                           <a:schemeClr val="tx1"/>
                         </a:solidFill>
-                        <a:latin typeface="Courier New" panose="02070309020205020404" pitchFamily="49" charset="0"/>
+                        <a:latin typeface="Montserrat" panose="00000500000000000000" pitchFamily="2" charset="0"/>
                         <a:cs typeface="Courier New" panose="02070309020205020404" pitchFamily="49" charset="0"/>
                       </a:endParaRPr>
                     </a:p>
@@ -18352,7 +18447,10 @@
                   <a:tcPr anchor="ctr">
                     <a:lnL w="12700" cap="flat" cmpd="sng" algn="ctr">
                       <a:solidFill>
-                        <a:schemeClr val="tx1"/>
+                        <a:schemeClr val="tx1">
+                          <a:lumMod val="50000"/>
+                          <a:lumOff val="50000"/>
+                        </a:schemeClr>
                       </a:solidFill>
                       <a:prstDash val="solid"/>
                       <a:round/>
@@ -18361,7 +18459,10 @@
                     </a:lnL>
                     <a:lnR w="12700" cap="flat" cmpd="sng" algn="ctr">
                       <a:solidFill>
-                        <a:schemeClr val="tx1"/>
+                        <a:schemeClr val="tx1">
+                          <a:lumMod val="50000"/>
+                          <a:lumOff val="50000"/>
+                        </a:schemeClr>
                       </a:solidFill>
                       <a:prstDash val="solid"/>
                       <a:round/>
@@ -18370,7 +18471,10 @@
                     </a:lnR>
                     <a:lnT w="12700" cap="flat" cmpd="sng" algn="ctr">
                       <a:solidFill>
-                        <a:schemeClr val="tx1"/>
+                        <a:schemeClr val="tx1">
+                          <a:lumMod val="50000"/>
+                          <a:lumOff val="50000"/>
+                        </a:schemeClr>
                       </a:solidFill>
                       <a:prstDash val="solid"/>
                       <a:round/>
@@ -18379,7 +18483,10 @@
                     </a:lnT>
                     <a:lnB w="12700" cap="flat" cmpd="sng" algn="ctr">
                       <a:solidFill>
-                        <a:schemeClr val="tx1"/>
+                        <a:schemeClr val="tx1">
+                          <a:lumMod val="50000"/>
+                          <a:lumOff val="50000"/>
+                        </a:schemeClr>
                       </a:solidFill>
                       <a:prstDash val="solid"/>
                       <a:round/>
@@ -18401,12 +18508,13 @@
                     <a:bodyPr/>
                     <a:lstStyle/>
                     <a:p>
+                      <a:pPr algn="ctr"/>
                       <a:r>
                         <a:rPr lang="en-US" altLang="zh-CN" sz="1400" b="0" dirty="0">
                           <a:solidFill>
                             <a:schemeClr val="tx1"/>
                           </a:solidFill>
-                          <a:latin typeface="Courier New" panose="02070309020205020404" pitchFamily="49" charset="0"/>
+                          <a:latin typeface="Montserrat" panose="00000500000000000000" pitchFamily="2" charset="0"/>
                           <a:cs typeface="Courier New" panose="02070309020205020404" pitchFamily="49" charset="0"/>
                         </a:rPr>
                         <a:t>Link layer</a:t>
@@ -18415,7 +18523,7 @@
                         <a:solidFill>
                           <a:schemeClr val="tx1"/>
                         </a:solidFill>
-                        <a:latin typeface="Courier New" panose="02070309020205020404" pitchFamily="49" charset="0"/>
+                        <a:latin typeface="Montserrat" panose="00000500000000000000" pitchFamily="2" charset="0"/>
                         <a:cs typeface="Courier New" panose="02070309020205020404" pitchFamily="49" charset="0"/>
                       </a:endParaRPr>
                     </a:p>
@@ -18423,7 +18531,10 @@
                   <a:tcPr anchor="ctr">
                     <a:lnL w="12700" cap="flat" cmpd="sng" algn="ctr">
                       <a:solidFill>
-                        <a:schemeClr val="tx1"/>
+                        <a:schemeClr val="tx1">
+                          <a:lumMod val="50000"/>
+                          <a:lumOff val="50000"/>
+                        </a:schemeClr>
                       </a:solidFill>
                       <a:prstDash val="solid"/>
                       <a:round/>
@@ -18432,7 +18543,10 @@
                     </a:lnL>
                     <a:lnR w="12700" cap="flat" cmpd="sng" algn="ctr">
                       <a:solidFill>
-                        <a:schemeClr val="tx1"/>
+                        <a:schemeClr val="tx1">
+                          <a:lumMod val="50000"/>
+                          <a:lumOff val="50000"/>
+                        </a:schemeClr>
                       </a:solidFill>
                       <a:prstDash val="solid"/>
                       <a:round/>
@@ -18441,7 +18555,10 @@
                     </a:lnR>
                     <a:lnT w="12700" cap="flat" cmpd="sng" algn="ctr">
                       <a:solidFill>
-                        <a:schemeClr val="tx1"/>
+                        <a:schemeClr val="tx1">
+                          <a:lumMod val="50000"/>
+                          <a:lumOff val="50000"/>
+                        </a:schemeClr>
                       </a:solidFill>
                       <a:prstDash val="solid"/>
                       <a:round/>
@@ -18450,7 +18567,10 @@
                     </a:lnT>
                     <a:lnB w="12700" cap="flat" cmpd="sng" algn="ctr">
                       <a:solidFill>
-                        <a:schemeClr val="tx1"/>
+                        <a:schemeClr val="tx1">
+                          <a:lumMod val="50000"/>
+                          <a:lumOff val="50000"/>
+                        </a:schemeClr>
                       </a:solidFill>
                       <a:prstDash val="solid"/>
                       <a:round/>
@@ -18472,12 +18592,13 @@
                     <a:bodyPr/>
                     <a:lstStyle/>
                     <a:p>
+                      <a:pPr algn="ctr"/>
                       <a:r>
                         <a:rPr lang="en-US" altLang="zh-CN" sz="1400" b="0" dirty="0">
                           <a:solidFill>
                             <a:schemeClr val="tx1"/>
                           </a:solidFill>
-                          <a:latin typeface="Courier New" panose="02070309020205020404" pitchFamily="49" charset="0"/>
+                          <a:latin typeface="Montserrat" panose="00000500000000000000" pitchFamily="2" charset="0"/>
                           <a:cs typeface="Courier New" panose="02070309020205020404" pitchFamily="49" charset="0"/>
                         </a:rPr>
                         <a:t>Physical layer</a:t>
@@ -18486,7 +18607,7 @@
                         <a:solidFill>
                           <a:schemeClr val="tx1"/>
                         </a:solidFill>
-                        <a:latin typeface="Courier New" panose="02070309020205020404" pitchFamily="49" charset="0"/>
+                        <a:latin typeface="Montserrat" panose="00000500000000000000" pitchFamily="2" charset="0"/>
                         <a:cs typeface="Courier New" panose="02070309020205020404" pitchFamily="49" charset="0"/>
                       </a:endParaRPr>
                     </a:p>
@@ -18494,7 +18615,10 @@
                   <a:tcPr anchor="ctr">
                     <a:lnL w="12700" cap="flat" cmpd="sng" algn="ctr">
                       <a:solidFill>
-                        <a:schemeClr val="tx1"/>
+                        <a:schemeClr val="tx1">
+                          <a:lumMod val="50000"/>
+                          <a:lumOff val="50000"/>
+                        </a:schemeClr>
                       </a:solidFill>
                       <a:prstDash val="solid"/>
                       <a:round/>
@@ -18503,7 +18627,10 @@
                     </a:lnL>
                     <a:lnR w="12700" cap="flat" cmpd="sng" algn="ctr">
                       <a:solidFill>
-                        <a:schemeClr val="tx1"/>
+                        <a:schemeClr val="tx1">
+                          <a:lumMod val="50000"/>
+                          <a:lumOff val="50000"/>
+                        </a:schemeClr>
                       </a:solidFill>
                       <a:prstDash val="solid"/>
                       <a:round/>
@@ -18512,7 +18639,10 @@
                     </a:lnR>
                     <a:lnT w="12700" cap="flat" cmpd="sng" algn="ctr">
                       <a:solidFill>
-                        <a:schemeClr val="tx1"/>
+                        <a:schemeClr val="tx1">
+                          <a:lumMod val="50000"/>
+                          <a:lumOff val="50000"/>
+                        </a:schemeClr>
                       </a:solidFill>
                       <a:prstDash val="solid"/>
                       <a:round/>
@@ -18521,7 +18651,10 @@
                     </a:lnT>
                     <a:lnB w="12700" cap="flat" cmpd="sng" algn="ctr">
                       <a:solidFill>
-                        <a:schemeClr val="tx1"/>
+                        <a:schemeClr val="tx1">
+                          <a:lumMod val="50000"/>
+                          <a:lumOff val="50000"/>
+                        </a:schemeClr>
                       </a:solidFill>
                       <a:prstDash val="solid"/>
                       <a:round/>
@@ -18557,7 +18690,7 @@
         </p:nvSpPr>
         <p:spPr>
           <a:xfrm>
-            <a:off x="10167620" y="1873707"/>
+            <a:off x="10167620" y="1787982"/>
             <a:ext cx="432000" cy="432000"/>
           </a:xfrm>
           <a:prstGeom prst="ellipse">
@@ -18590,20 +18723,20 @@
           <a:p>
             <a:pPr algn="ctr"/>
             <a:r>
-              <a:rPr lang="en-US" altLang="zh-CN" sz="1200" dirty="0">
+              <a:rPr lang="en-US" altLang="zh-CN" sz="1100" dirty="0">
                 <a:solidFill>
                   <a:sysClr val="windowText" lastClr="000000"/>
                 </a:solidFill>
-                <a:latin typeface="Courier New" panose="02070309020205020404" pitchFamily="49" charset="0"/>
+                <a:latin typeface="Montserrat" panose="00000500000000000000" pitchFamily="2" charset="0"/>
                 <a:cs typeface="Courier New" panose="02070309020205020404" pitchFamily="49" charset="0"/>
               </a:rPr>
               <a:t>AP1</a:t>
             </a:r>
-            <a:endParaRPr lang="zh-CN" altLang="en-US" sz="1200" dirty="0">
+            <a:endParaRPr lang="zh-CN" altLang="en-US" sz="1100" dirty="0">
               <a:solidFill>
                 <a:sysClr val="windowText" lastClr="000000"/>
               </a:solidFill>
-              <a:latin typeface="Courier New" panose="02070309020205020404" pitchFamily="49" charset="0"/>
+              <a:latin typeface="Montserrat" panose="00000500000000000000" pitchFamily="2" charset="0"/>
               <a:cs typeface="Courier New" panose="02070309020205020404" pitchFamily="49" charset="0"/>
             </a:endParaRPr>
           </a:p>
@@ -18625,7 +18758,7 @@
         </p:nvSpPr>
         <p:spPr>
           <a:xfrm>
-            <a:off x="8945697" y="2003982"/>
+            <a:off x="8945697" y="1787982"/>
             <a:ext cx="432000" cy="432000"/>
           </a:xfrm>
           <a:prstGeom prst="ellipse">
@@ -18658,20 +18791,20 @@
           <a:p>
             <a:pPr algn="ctr"/>
             <a:r>
-              <a:rPr lang="en-US" altLang="zh-CN" sz="1200" dirty="0">
+              <a:rPr lang="en-US" altLang="zh-CN" sz="1100" dirty="0">
                 <a:solidFill>
                   <a:sysClr val="windowText" lastClr="000000"/>
                 </a:solidFill>
-                <a:latin typeface="Courier New" panose="02070309020205020404" pitchFamily="49" charset="0"/>
+                <a:latin typeface="Montserrat" panose="00000500000000000000" pitchFamily="2" charset="0"/>
                 <a:cs typeface="Courier New" panose="02070309020205020404" pitchFamily="49" charset="0"/>
               </a:rPr>
               <a:t>AP4</a:t>
             </a:r>
-            <a:endParaRPr lang="zh-CN" altLang="en-US" sz="1200" dirty="0">
+            <a:endParaRPr lang="zh-CN" altLang="en-US" sz="1100" dirty="0">
               <a:solidFill>
                 <a:sysClr val="windowText" lastClr="000000"/>
               </a:solidFill>
-              <a:latin typeface="Courier New" panose="02070309020205020404" pitchFamily="49" charset="0"/>
+              <a:latin typeface="Montserrat" panose="00000500000000000000" pitchFamily="2" charset="0"/>
               <a:cs typeface="Courier New" panose="02070309020205020404" pitchFamily="49" charset="0"/>
             </a:endParaRPr>
           </a:p>
@@ -18726,20 +18859,20 @@
           <a:p>
             <a:pPr algn="ctr"/>
             <a:r>
-              <a:rPr lang="en-US" altLang="zh-CN" sz="1200" dirty="0">
+              <a:rPr lang="en-US" altLang="zh-CN" sz="1100" dirty="0">
                 <a:solidFill>
                   <a:sysClr val="windowText" lastClr="000000"/>
                 </a:solidFill>
-                <a:latin typeface="Courier New" panose="02070309020205020404" pitchFamily="49" charset="0"/>
+                <a:latin typeface="Montserrat" panose="00000500000000000000" pitchFamily="2" charset="0"/>
                 <a:cs typeface="Courier New" panose="02070309020205020404" pitchFamily="49" charset="0"/>
               </a:rPr>
               <a:t>AP3</a:t>
             </a:r>
-            <a:endParaRPr lang="zh-CN" altLang="en-US" sz="1200" dirty="0">
+            <a:endParaRPr lang="zh-CN" altLang="en-US" sz="1100" dirty="0">
               <a:solidFill>
                 <a:sysClr val="windowText" lastClr="000000"/>
               </a:solidFill>
-              <a:latin typeface="Courier New" panose="02070309020205020404" pitchFamily="49" charset="0"/>
+              <a:latin typeface="Montserrat" panose="00000500000000000000" pitchFamily="2" charset="0"/>
               <a:cs typeface="Courier New" panose="02070309020205020404" pitchFamily="49" charset="0"/>
             </a:endParaRPr>
           </a:p>
@@ -18759,8 +18892,8 @@
         </p:nvSpPr>
         <p:spPr>
           <a:xfrm>
-            <a:off x="8350298" y="3527604"/>
-            <a:ext cx="1063399" cy="320496"/>
+            <a:off x="8350297" y="3248193"/>
+            <a:ext cx="1080000" cy="432000"/>
           </a:xfrm>
           <a:prstGeom prst="rect">
             <a:avLst/>
@@ -18798,7 +18931,7 @@
                 <a:solidFill>
                   <a:schemeClr val="tx1"/>
                 </a:solidFill>
-                <a:latin typeface="Courier New" panose="02070309020205020404" pitchFamily="49" charset="0"/>
+                <a:latin typeface="Montserrat" panose="00000500000000000000" pitchFamily="2" charset="0"/>
                 <a:cs typeface="Courier New" panose="02070309020205020404" pitchFamily="49" charset="0"/>
               </a:rPr>
               <a:t>UDP</a:t>
@@ -18807,7 +18940,7 @@
               <a:solidFill>
                 <a:schemeClr val="tx1"/>
               </a:solidFill>
-              <a:latin typeface="Courier New" panose="02070309020205020404" pitchFamily="49" charset="0"/>
+              <a:latin typeface="Montserrat" panose="00000500000000000000" pitchFamily="2" charset="0"/>
               <a:cs typeface="Courier New" panose="02070309020205020404" pitchFamily="49" charset="0"/>
             </a:endParaRPr>
           </a:p>
@@ -18827,8 +18960,8 @@
         </p:nvSpPr>
         <p:spPr>
           <a:xfrm>
-            <a:off x="9572220" y="3527604"/>
-            <a:ext cx="1063399" cy="320496"/>
+            <a:off x="9572219" y="3248193"/>
+            <a:ext cx="1080000" cy="432000"/>
           </a:xfrm>
           <a:prstGeom prst="rect">
             <a:avLst/>
@@ -18866,7 +18999,7 @@
                 <a:solidFill>
                   <a:schemeClr val="tx1"/>
                 </a:solidFill>
-                <a:latin typeface="Courier New" panose="02070309020205020404" pitchFamily="49" charset="0"/>
+                <a:latin typeface="Montserrat" panose="00000500000000000000" pitchFamily="2" charset="0"/>
                 <a:cs typeface="Courier New" panose="02070309020205020404" pitchFamily="49" charset="0"/>
               </a:rPr>
               <a:t>TCP</a:t>
@@ -18875,7 +19008,7 @@
               <a:solidFill>
                 <a:schemeClr val="tx1"/>
               </a:solidFill>
-              <a:latin typeface="Courier New" panose="02070309020205020404" pitchFamily="49" charset="0"/>
+              <a:latin typeface="Montserrat" panose="00000500000000000000" pitchFamily="2" charset="0"/>
               <a:cs typeface="Courier New" panose="02070309020205020404" pitchFamily="49" charset="0"/>
             </a:endParaRPr>
           </a:p>
@@ -18895,17 +19028,18 @@
         </p:nvSpPr>
         <p:spPr>
           <a:xfrm>
-            <a:off x="8350298" y="2749629"/>
+            <a:off x="8350298" y="2493571"/>
             <a:ext cx="504000" cy="216000"/>
           </a:xfrm>
           <a:prstGeom prst="rect">
             <a:avLst/>
           </a:prstGeom>
-          <a:solidFill>
-            <a:schemeClr val="bg1"/>
-          </a:solidFill>
-          <a:ln>
-            <a:noFill/>
+          <a:noFill/>
+          <a:ln w="6350">
+            <a:solidFill>
+              <a:schemeClr val="bg1"/>
+            </a:solidFill>
+            <a:prstDash val="lgDash"/>
           </a:ln>
         </p:spPr>
         <p:style>
@@ -18930,20 +19064,20 @@
           <a:p>
             <a:pPr algn="ctr"/>
             <a:r>
-              <a:rPr lang="en-US" altLang="zh-CN" sz="1200" dirty="0">
+              <a:rPr lang="en-US" altLang="zh-CN" sz="1100" dirty="0">
                 <a:solidFill>
-                  <a:schemeClr val="tx1"/>
+                  <a:schemeClr val="bg1"/>
                 </a:solidFill>
-                <a:latin typeface="Courier New" panose="02070309020205020404" pitchFamily="49" charset="0"/>
+                <a:latin typeface="Montserrat" panose="00000500000000000000" pitchFamily="2" charset="0"/>
                 <a:cs typeface="Courier New" panose="02070309020205020404" pitchFamily="49" charset="0"/>
               </a:rPr>
               <a:t>port</a:t>
             </a:r>
-            <a:endParaRPr lang="zh-CN" altLang="en-US" sz="1200" dirty="0">
+            <a:endParaRPr lang="zh-CN" altLang="en-US" sz="1100" dirty="0">
               <a:solidFill>
-                <a:schemeClr val="tx1"/>
+                <a:schemeClr val="bg1"/>
               </a:solidFill>
-              <a:latin typeface="Courier New" panose="02070309020205020404" pitchFamily="49" charset="0"/>
+              <a:latin typeface="Montserrat" panose="00000500000000000000" pitchFamily="2" charset="0"/>
               <a:cs typeface="Courier New" panose="02070309020205020404" pitchFamily="49" charset="0"/>
             </a:endParaRPr>
           </a:p>
@@ -18963,17 +19097,18 @@
         </p:nvSpPr>
         <p:spPr>
           <a:xfrm>
-            <a:off x="8909697" y="2746533"/>
+            <a:off x="8909697" y="2493571"/>
             <a:ext cx="504000" cy="216000"/>
           </a:xfrm>
           <a:prstGeom prst="rect">
             <a:avLst/>
           </a:prstGeom>
-          <a:solidFill>
-            <a:schemeClr val="bg1"/>
-          </a:solidFill>
-          <a:ln>
-            <a:noFill/>
+          <a:noFill/>
+          <a:ln w="6350">
+            <a:solidFill>
+              <a:schemeClr val="bg1"/>
+            </a:solidFill>
+            <a:prstDash val="lgDash"/>
           </a:ln>
         </p:spPr>
         <p:style>
@@ -18998,20 +19133,20 @@
           <a:p>
             <a:pPr algn="ctr"/>
             <a:r>
-              <a:rPr lang="en-US" altLang="zh-CN" sz="1200" dirty="0">
+              <a:rPr lang="en-US" altLang="zh-CN" sz="1100" dirty="0">
                 <a:solidFill>
-                  <a:schemeClr val="tx1"/>
+                  <a:schemeClr val="bg1"/>
                 </a:solidFill>
-                <a:latin typeface="Courier New" panose="02070309020205020404" pitchFamily="49" charset="0"/>
+                <a:latin typeface="Montserrat" panose="00000500000000000000" pitchFamily="2" charset="0"/>
                 <a:cs typeface="Courier New" panose="02070309020205020404" pitchFamily="49" charset="0"/>
               </a:rPr>
               <a:t>port</a:t>
             </a:r>
-            <a:endParaRPr lang="zh-CN" altLang="en-US" sz="1200" dirty="0">
+            <a:endParaRPr lang="zh-CN" altLang="en-US" sz="1100" dirty="0">
               <a:solidFill>
-                <a:schemeClr val="tx1"/>
+                <a:schemeClr val="bg1"/>
               </a:solidFill>
-              <a:latin typeface="Courier New" panose="02070309020205020404" pitchFamily="49" charset="0"/>
+              <a:latin typeface="Montserrat" panose="00000500000000000000" pitchFamily="2" charset="0"/>
               <a:cs typeface="Courier New" panose="02070309020205020404" pitchFamily="49" charset="0"/>
             </a:endParaRPr>
           </a:p>
@@ -19031,17 +19166,18 @@
         </p:nvSpPr>
         <p:spPr>
           <a:xfrm>
-            <a:off x="10131620" y="2739114"/>
+            <a:off x="10131620" y="2493571"/>
             <a:ext cx="504000" cy="216000"/>
           </a:xfrm>
           <a:prstGeom prst="rect">
             <a:avLst/>
           </a:prstGeom>
-          <a:solidFill>
-            <a:schemeClr val="bg1"/>
-          </a:solidFill>
-          <a:ln>
-            <a:noFill/>
+          <a:noFill/>
+          <a:ln w="6350">
+            <a:solidFill>
+              <a:schemeClr val="bg1"/>
+            </a:solidFill>
+            <a:prstDash val="lgDash"/>
           </a:ln>
         </p:spPr>
         <p:style>
@@ -19066,20 +19202,20 @@
           <a:p>
             <a:pPr algn="ctr"/>
             <a:r>
-              <a:rPr lang="en-US" altLang="zh-CN" sz="1200" dirty="0">
+              <a:rPr lang="en-US" altLang="zh-CN" sz="1100" dirty="0">
                 <a:solidFill>
-                  <a:schemeClr val="tx1"/>
+                  <a:schemeClr val="bg1"/>
                 </a:solidFill>
-                <a:latin typeface="Courier New" panose="02070309020205020404" pitchFamily="49" charset="0"/>
+                <a:latin typeface="Montserrat" panose="00000500000000000000" pitchFamily="2" charset="0"/>
                 <a:cs typeface="Courier New" panose="02070309020205020404" pitchFamily="49" charset="0"/>
               </a:rPr>
               <a:t>port</a:t>
             </a:r>
-            <a:endParaRPr lang="zh-CN" altLang="en-US" sz="1200" dirty="0">
+            <a:endParaRPr lang="zh-CN" altLang="en-US" sz="1100" dirty="0">
               <a:solidFill>
-                <a:schemeClr val="tx1"/>
+                <a:schemeClr val="bg1"/>
               </a:solidFill>
-              <a:latin typeface="Courier New" panose="02070309020205020404" pitchFamily="49" charset="0"/>
+              <a:latin typeface="Montserrat" panose="00000500000000000000" pitchFamily="2" charset="0"/>
               <a:cs typeface="Courier New" panose="02070309020205020404" pitchFamily="49" charset="0"/>
             </a:endParaRPr>
           </a:p>
@@ -19101,7 +19237,7 @@
         </p:nvSpPr>
         <p:spPr>
           <a:xfrm>
-            <a:off x="9610183" y="1802688"/>
+            <a:off x="9610183" y="1787982"/>
             <a:ext cx="432000" cy="432000"/>
           </a:xfrm>
           <a:prstGeom prst="ellipse">
@@ -19134,20 +19270,20 @@
           <a:p>
             <a:pPr algn="ctr"/>
             <a:r>
-              <a:rPr lang="en-US" altLang="zh-CN" sz="1200" dirty="0">
+              <a:rPr lang="en-US" altLang="zh-CN" sz="1100" dirty="0">
                 <a:solidFill>
                   <a:sysClr val="windowText" lastClr="000000"/>
                 </a:solidFill>
-                <a:latin typeface="Courier New" panose="02070309020205020404" pitchFamily="49" charset="0"/>
+                <a:latin typeface="Montserrat" panose="00000500000000000000" pitchFamily="2" charset="0"/>
                 <a:cs typeface="Courier New" panose="02070309020205020404" pitchFamily="49" charset="0"/>
               </a:rPr>
               <a:t>AP2</a:t>
             </a:r>
-            <a:endParaRPr lang="zh-CN" altLang="en-US" sz="1200" dirty="0">
+            <a:endParaRPr lang="zh-CN" altLang="en-US" sz="1100" dirty="0">
               <a:solidFill>
                 <a:sysClr val="windowText" lastClr="000000"/>
               </a:solidFill>
-              <a:latin typeface="Courier New" panose="02070309020205020404" pitchFamily="49" charset="0"/>
+              <a:latin typeface="Montserrat" panose="00000500000000000000" pitchFamily="2" charset="0"/>
               <a:cs typeface="Courier New" panose="02070309020205020404" pitchFamily="49" charset="0"/>
             </a:endParaRPr>
           </a:p>
@@ -19167,17 +19303,18 @@
         </p:nvSpPr>
         <p:spPr>
           <a:xfrm>
-            <a:off x="9574183" y="2739114"/>
+            <a:off x="9574183" y="2493571"/>
             <a:ext cx="504000" cy="216000"/>
           </a:xfrm>
           <a:prstGeom prst="rect">
             <a:avLst/>
           </a:prstGeom>
-          <a:solidFill>
-            <a:schemeClr val="bg1"/>
-          </a:solidFill>
-          <a:ln>
-            <a:noFill/>
+          <a:noFill/>
+          <a:ln w="6350">
+            <a:solidFill>
+              <a:schemeClr val="bg1"/>
+            </a:solidFill>
+            <a:prstDash val="lgDash"/>
           </a:ln>
         </p:spPr>
         <p:style>
@@ -19202,20 +19339,20 @@
           <a:p>
             <a:pPr algn="ctr"/>
             <a:r>
-              <a:rPr lang="en-US" altLang="zh-CN" sz="1200" dirty="0">
+              <a:rPr lang="en-US" altLang="zh-CN" sz="1100" dirty="0">
                 <a:solidFill>
-                  <a:schemeClr val="tx1"/>
+                  <a:schemeClr val="bg1"/>
                 </a:solidFill>
-                <a:latin typeface="Courier New" panose="02070309020205020404" pitchFamily="49" charset="0"/>
+                <a:latin typeface="Montserrat" panose="00000500000000000000" pitchFamily="2" charset="0"/>
                 <a:cs typeface="Courier New" panose="02070309020205020404" pitchFamily="49" charset="0"/>
               </a:rPr>
               <a:t>port</a:t>
             </a:r>
-            <a:endParaRPr lang="zh-CN" altLang="en-US" sz="1200" dirty="0">
+            <a:endParaRPr lang="zh-CN" altLang="en-US" sz="1100" dirty="0">
               <a:solidFill>
-                <a:schemeClr val="tx1"/>
+                <a:schemeClr val="bg1"/>
               </a:solidFill>
-              <a:latin typeface="Courier New" panose="02070309020205020404" pitchFamily="49" charset="0"/>
+              <a:latin typeface="Montserrat" panose="00000500000000000000" pitchFamily="2" charset="0"/>
               <a:cs typeface="Courier New" panose="02070309020205020404" pitchFamily="49" charset="0"/>
             </a:endParaRPr>
           </a:p>
@@ -19239,14 +19376,14 @@
         <p:spPr>
           <a:xfrm flipH="1">
             <a:off x="10383620" y="2305707"/>
-            <a:ext cx="1" cy="433407"/>
+            <a:ext cx="1" cy="187864"/>
           </a:xfrm>
           <a:prstGeom prst="straightConnector1">
             <a:avLst/>
           </a:prstGeom>
           <a:ln w="38100">
             <a:solidFill>
-              <a:srgbClr val="FF0000"/>
+              <a:schemeClr val="tx1"/>
             </a:solidFill>
             <a:headEnd type="triangle"/>
             <a:tailEnd type="none"/>
@@ -19285,15 +19422,15 @@
         </p:nvCxnSpPr>
         <p:spPr>
           <a:xfrm>
-            <a:off x="9826183" y="2234688"/>
-            <a:ext cx="0" cy="504426"/>
+            <a:off x="9826183" y="2219982"/>
+            <a:ext cx="0" cy="273589"/>
           </a:xfrm>
           <a:prstGeom prst="straightConnector1">
             <a:avLst/>
           </a:prstGeom>
           <a:ln w="38100">
             <a:solidFill>
-              <a:srgbClr val="FF0000"/>
+              <a:schemeClr val="tx1"/>
             </a:solidFill>
             <a:headEnd type="triangle"/>
             <a:tailEnd type="none"/>
@@ -19331,15 +19468,15 @@
         </p:nvCxnSpPr>
         <p:spPr>
           <a:xfrm>
-            <a:off x="9161697" y="2435982"/>
-            <a:ext cx="0" cy="310551"/>
+            <a:off x="9161697" y="2219982"/>
+            <a:ext cx="0" cy="273589"/>
           </a:xfrm>
           <a:prstGeom prst="straightConnector1">
             <a:avLst/>
           </a:prstGeom>
           <a:ln w="38100">
             <a:solidFill>
-              <a:srgbClr val="FF0000"/>
+              <a:schemeClr val="tx1"/>
             </a:solidFill>
             <a:headEnd type="triangle"/>
             <a:tailEnd type="none"/>
@@ -19378,14 +19515,14 @@
         <p:spPr>
           <a:xfrm>
             <a:off x="8594831" y="2219982"/>
-            <a:ext cx="7467" cy="529647"/>
+            <a:ext cx="7467" cy="273589"/>
           </a:xfrm>
           <a:prstGeom prst="straightConnector1">
             <a:avLst/>
           </a:prstGeom>
           <a:ln w="38100">
             <a:solidFill>
-              <a:srgbClr val="FF0000"/>
+              <a:schemeClr val="tx1"/>
             </a:solidFill>
             <a:headEnd type="triangle"/>
             <a:tailEnd type="none"/>
@@ -19423,15 +19560,15 @@
         </p:nvCxnSpPr>
         <p:spPr>
           <a:xfrm flipH="1">
-            <a:off x="8594831" y="2965629"/>
-            <a:ext cx="7467" cy="561975"/>
+            <a:off x="8594831" y="2709571"/>
+            <a:ext cx="7467" cy="432000"/>
           </a:xfrm>
           <a:prstGeom prst="straightConnector1">
             <a:avLst/>
           </a:prstGeom>
           <a:ln w="38100">
             <a:solidFill>
-              <a:srgbClr val="FF0000"/>
+              <a:schemeClr val="tx1"/>
             </a:solidFill>
             <a:headEnd type="triangle"/>
             <a:tailEnd type="none"/>
@@ -19469,15 +19606,15 @@
         </p:nvCxnSpPr>
         <p:spPr>
           <a:xfrm flipH="1">
-            <a:off x="9154230" y="2962533"/>
-            <a:ext cx="7467" cy="561975"/>
+            <a:off x="9154230" y="2709571"/>
+            <a:ext cx="7467" cy="432000"/>
           </a:xfrm>
           <a:prstGeom prst="straightConnector1">
             <a:avLst/>
           </a:prstGeom>
           <a:ln w="38100">
             <a:solidFill>
-              <a:srgbClr val="FF0000"/>
+              <a:schemeClr val="tx1"/>
             </a:solidFill>
             <a:headEnd type="triangle"/>
             <a:tailEnd type="none"/>
@@ -19515,15 +19652,15 @@
         </p:nvCxnSpPr>
         <p:spPr>
           <a:xfrm>
-            <a:off x="9826183" y="2955114"/>
-            <a:ext cx="0" cy="569394"/>
+            <a:off x="9826183" y="2709571"/>
+            <a:ext cx="0" cy="432000"/>
           </a:xfrm>
           <a:prstGeom prst="straightConnector1">
             <a:avLst/>
           </a:prstGeom>
           <a:ln w="38100">
             <a:solidFill>
-              <a:srgbClr val="FF0000"/>
+              <a:schemeClr val="tx1"/>
             </a:solidFill>
             <a:headEnd type="triangle"/>
             <a:tailEnd type="none"/>
@@ -19561,15 +19698,15 @@
         </p:nvCxnSpPr>
         <p:spPr>
           <a:xfrm flipH="1">
-            <a:off x="10383619" y="2955114"/>
-            <a:ext cx="1" cy="569394"/>
+            <a:off x="10383619" y="2709571"/>
+            <a:ext cx="1" cy="432000"/>
           </a:xfrm>
           <a:prstGeom prst="straightConnector1">
             <a:avLst/>
           </a:prstGeom>
           <a:ln w="38100">
             <a:solidFill>
-              <a:srgbClr val="FF0000"/>
+              <a:schemeClr val="tx1"/>
             </a:solidFill>
             <a:headEnd type="triangle"/>
             <a:tailEnd type="none"/>
@@ -19610,11 +19747,12 @@
           <a:prstGeom prst="rect">
             <a:avLst/>
           </a:prstGeom>
-          <a:solidFill>
-            <a:schemeClr val="bg1"/>
-          </a:solidFill>
-          <a:ln>
-            <a:noFill/>
+          <a:noFill/>
+          <a:ln w="6350">
+            <a:solidFill>
+              <a:schemeClr val="bg1"/>
+            </a:solidFill>
+            <a:prstDash val="lgDash"/>
           </a:ln>
         </p:spPr>
         <p:style>
@@ -19639,20 +19777,20 @@
           <a:p>
             <a:pPr algn="ctr"/>
             <a:r>
-              <a:rPr lang="en-US" altLang="zh-CN" sz="1400" dirty="0">
+              <a:rPr lang="en-US" altLang="zh-CN" sz="1200" dirty="0">
                 <a:solidFill>
-                  <a:schemeClr val="tx1"/>
+                  <a:schemeClr val="bg1"/>
                 </a:solidFill>
-                <a:latin typeface="Courier New" panose="02070309020205020404" pitchFamily="49" charset="0"/>
+                <a:latin typeface="Montserrat" panose="00000500000000000000" pitchFamily="2" charset="0"/>
                 <a:cs typeface="Courier New" panose="02070309020205020404" pitchFamily="49" charset="0"/>
               </a:rPr>
               <a:t>Demultiplexing</a:t>
             </a:r>
-            <a:endParaRPr lang="zh-CN" altLang="en-US" sz="1400" dirty="0">
+            <a:endParaRPr lang="zh-CN" altLang="en-US" sz="1200" dirty="0">
               <a:solidFill>
-                <a:schemeClr val="tx1"/>
+                <a:schemeClr val="bg1"/>
               </a:solidFill>
-              <a:latin typeface="Courier New" panose="02070309020205020404" pitchFamily="49" charset="0"/>
+              <a:latin typeface="Montserrat" panose="00000500000000000000" pitchFamily="2" charset="0"/>
               <a:cs typeface="Courier New" panose="02070309020205020404" pitchFamily="49" charset="0"/>
             </a:endParaRPr>
           </a:p>
@@ -19674,15 +19812,15 @@
         </p:nvCxnSpPr>
         <p:spPr>
           <a:xfrm>
-            <a:off x="8909697" y="3848100"/>
-            <a:ext cx="0" cy="381996"/>
+            <a:off x="8909697" y="3763430"/>
+            <a:ext cx="0" cy="432000"/>
           </a:xfrm>
           <a:prstGeom prst="straightConnector1">
             <a:avLst/>
           </a:prstGeom>
           <a:ln w="38100">
             <a:solidFill>
-              <a:srgbClr val="FF0000"/>
+              <a:schemeClr val="tx1"/>
             </a:solidFill>
             <a:headEnd type="triangle"/>
             <a:tailEnd type="none"/>
@@ -19719,15 +19857,15 @@
         </p:nvCxnSpPr>
         <p:spPr>
           <a:xfrm>
-            <a:off x="10131620" y="3848100"/>
-            <a:ext cx="0" cy="381996"/>
+            <a:off x="10131620" y="3763430"/>
+            <a:ext cx="0" cy="432000"/>
           </a:xfrm>
           <a:prstGeom prst="straightConnector1">
             <a:avLst/>
           </a:prstGeom>
           <a:ln w="38100">
             <a:solidFill>
-              <a:srgbClr val="FF0000"/>
+              <a:schemeClr val="tx1"/>
             </a:solidFill>
             <a:headEnd type="triangle"/>
             <a:tailEnd type="none"/>
@@ -19770,7 +19908,7 @@
           </a:prstGeom>
           <a:ln w="38100">
             <a:solidFill>
-              <a:srgbClr val="FF0000"/>
+              <a:schemeClr val="tx1"/>
             </a:solidFill>
             <a:headEnd type="triangle"/>
             <a:tailEnd type="none"/>
@@ -20040,8 +20178,8 @@
         </p:nvSpPr>
         <p:spPr>
           <a:xfrm>
-            <a:off x="5863656" y="1596708"/>
-            <a:ext cx="1579278" cy="276999"/>
+            <a:off x="5951019" y="1596708"/>
+            <a:ext cx="1404551" cy="276999"/>
           </a:xfrm>
           <a:prstGeom prst="rect">
             <a:avLst/>
@@ -20057,13 +20195,13 @@
             <a:pPr algn="ctr"/>
             <a:r>
               <a:rPr lang="en-US" altLang="zh-CN" sz="1200" dirty="0">
-                <a:latin typeface="Courier New" panose="02070309020205020404" pitchFamily="49" charset="0"/>
+                <a:latin typeface="Montserrat" panose="00000500000000000000" pitchFamily="2" charset="0"/>
                 <a:cs typeface="Courier New" panose="02070309020205020404" pitchFamily="49" charset="0"/>
               </a:rPr>
               <a:t>Logical channel</a:t>
             </a:r>
             <a:endParaRPr lang="zh-CN" altLang="en-US" sz="1200" dirty="0">
-              <a:latin typeface="Courier New" panose="02070309020205020404" pitchFamily="49" charset="0"/>
+              <a:latin typeface="Montserrat" panose="00000500000000000000" pitchFamily="2" charset="0"/>
               <a:cs typeface="Courier New" panose="02070309020205020404" pitchFamily="49" charset="0"/>
             </a:endParaRPr>
           </a:p>
@@ -20083,8 +20221,8 @@
         </p:nvSpPr>
         <p:spPr>
           <a:xfrm>
-            <a:off x="5863656" y="3380601"/>
-            <a:ext cx="1579278" cy="276999"/>
+            <a:off x="5951019" y="3380601"/>
+            <a:ext cx="1404551" cy="276999"/>
           </a:xfrm>
           <a:prstGeom prst="rect">
             <a:avLst/>
@@ -20100,13 +20238,13 @@
             <a:pPr algn="ctr"/>
             <a:r>
               <a:rPr lang="en-US" altLang="zh-CN" sz="1200" dirty="0">
-                <a:latin typeface="Courier New" panose="02070309020205020404" pitchFamily="49" charset="0"/>
+                <a:latin typeface="Montserrat" panose="00000500000000000000" pitchFamily="2" charset="0"/>
                 <a:cs typeface="Courier New" panose="02070309020205020404" pitchFamily="49" charset="0"/>
               </a:rPr>
               <a:t>Logical channel</a:t>
             </a:r>
             <a:endParaRPr lang="zh-CN" altLang="en-US" sz="1200" dirty="0">
-              <a:latin typeface="Courier New" panose="02070309020205020404" pitchFamily="49" charset="0"/>
+              <a:latin typeface="Montserrat" panose="00000500000000000000" pitchFamily="2" charset="0"/>
               <a:cs typeface="Courier New" panose="02070309020205020404" pitchFamily="49" charset="0"/>
             </a:endParaRPr>
           </a:p>
@@ -20126,8 +20264,8 @@
         </p:nvSpPr>
         <p:spPr>
           <a:xfrm>
-            <a:off x="5863656" y="4923651"/>
-            <a:ext cx="1579278" cy="276999"/>
+            <a:off x="5951019" y="4923651"/>
+            <a:ext cx="1404551" cy="276999"/>
           </a:xfrm>
           <a:prstGeom prst="rect">
             <a:avLst/>
@@ -20143,13 +20281,13 @@
             <a:pPr algn="ctr"/>
             <a:r>
               <a:rPr lang="en-US" altLang="zh-CN" sz="1200" dirty="0">
-                <a:latin typeface="Courier New" panose="02070309020205020404" pitchFamily="49" charset="0"/>
+                <a:latin typeface="Montserrat" panose="00000500000000000000" pitchFamily="2" charset="0"/>
                 <a:cs typeface="Courier New" panose="02070309020205020404" pitchFamily="49" charset="0"/>
               </a:rPr>
               <a:t>Logical channel</a:t>
             </a:r>
             <a:endParaRPr lang="zh-CN" altLang="en-US" sz="1200" dirty="0">
-              <a:latin typeface="Courier New" panose="02070309020205020404" pitchFamily="49" charset="0"/>
+              <a:latin typeface="Montserrat" panose="00000500000000000000" pitchFamily="2" charset="0"/>
               <a:cs typeface="Courier New" panose="02070309020205020404" pitchFamily="49" charset="0"/>
             </a:endParaRPr>
           </a:p>
@@ -20169,8 +20307,8 @@
         </p:nvSpPr>
         <p:spPr>
           <a:xfrm>
-            <a:off x="5863656" y="5285601"/>
-            <a:ext cx="1579278" cy="276999"/>
+            <a:off x="5951019" y="5285601"/>
+            <a:ext cx="1404551" cy="276999"/>
           </a:xfrm>
           <a:prstGeom prst="rect">
             <a:avLst/>
@@ -20186,13 +20324,13 @@
             <a:pPr algn="ctr"/>
             <a:r>
               <a:rPr lang="en-US" altLang="zh-CN" sz="1200" dirty="0">
-                <a:latin typeface="Courier New" panose="02070309020205020404" pitchFamily="49" charset="0"/>
+                <a:latin typeface="Montserrat" panose="00000500000000000000" pitchFamily="2" charset="0"/>
                 <a:cs typeface="Courier New" panose="02070309020205020404" pitchFamily="49" charset="0"/>
               </a:rPr>
               <a:t>Logical channel</a:t>
             </a:r>
             <a:endParaRPr lang="zh-CN" altLang="en-US" sz="1200" dirty="0">
-              <a:latin typeface="Courier New" panose="02070309020205020404" pitchFamily="49" charset="0"/>
+              <a:latin typeface="Montserrat" panose="00000500000000000000" pitchFamily="2" charset="0"/>
               <a:cs typeface="Courier New" panose="02070309020205020404" pitchFamily="49" charset="0"/>
             </a:endParaRPr>
           </a:p>
